--- a/rapports/septembre/Iopole_sept2026.pptx
+++ b/rapports/septembre/Iopole_sept2026.pptx
@@ -5642,7 +5642,7 @@
                 </a:solidFill>
                 <a:latin typeface="Arial"/>
               </a:rPr>
-              <a:t>MARQUES CITÉES</a:t>
+              <a:t>CATÉGORIES DE PRODUITS</a:t>
             </a:r>
           </a:p>
         </p:txBody>
@@ -5677,7 +5677,7 @@
                 </a:solidFill>
                 <a:latin typeface="Arial"/>
               </a:rPr>
-              <a:t>Part de voix dans les messages utilisateurs</a:t>
+              <a:t>Répartition des requêtes</a:t>
             </a:r>
           </a:p>
         </p:txBody>
@@ -5770,7 +5770,7 @@
         <p:spPr>
           <a:xfrm>
             <a:off x="8296656" y="4389120"/>
-            <a:ext cx="2072640" cy="152400"/>
+            <a:ext cx="2225040" cy="152400"/>
           </a:xfrm>
           <a:prstGeom prst="rect">
             <a:avLst/>
@@ -5785,13 +5785,13 @@
           <a:p>
             <a:pPr algn="l"/>
             <a:r>
-              <a:rPr sz="1000" b="0" i="0">
+              <a:rPr sz="800" b="0" i="0">
                 <a:solidFill>
                   <a:srgbClr val="111111"/>
                 </a:solidFill>
                 <a:latin typeface="Arial"/>
               </a:rPr>
-              <a:t>Chorus Pro</a:t>
+              <a:t>Compréhension de la facturation électronique</a:t>
             </a:r>
           </a:p>
         </p:txBody>
@@ -5849,7 +5849,7 @@
         <p:spPr>
           <a:xfrm>
             <a:off x="8296656" y="4657344"/>
-            <a:ext cx="2072640" cy="152400"/>
+            <a:ext cx="2225040" cy="152400"/>
           </a:xfrm>
           <a:prstGeom prst="rect">
             <a:avLst/>
@@ -5864,13 +5864,13 @@
           <a:p>
             <a:pPr algn="l"/>
             <a:r>
-              <a:rPr sz="1000" b="0" i="0">
+              <a:rPr sz="800" b="0" i="0">
                 <a:solidFill>
                   <a:srgbClr val="111111"/>
                 </a:solidFill>
                 <a:latin typeface="Arial"/>
               </a:rPr>
-              <a:t>Pennylane · 12 %</a:t>
+              <a:t>Recherche et comparaison de plateformes agréées · 29 %</a:t>
             </a:r>
           </a:p>
         </p:txBody>
@@ -5928,7 +5928,7 @@
         <p:spPr>
           <a:xfrm>
             <a:off x="8296656" y="4925568"/>
-            <a:ext cx="2072640" cy="152400"/>
+            <a:ext cx="2225040" cy="152400"/>
           </a:xfrm>
           <a:prstGeom prst="rect">
             <a:avLst/>
@@ -5943,13 +5943,13 @@
           <a:p>
             <a:pPr algn="l"/>
             <a:r>
-              <a:rPr sz="1000" b="0" i="0">
+              <a:rPr sz="800" b="0" i="0">
                 <a:solidFill>
                   <a:srgbClr val="111111"/>
                 </a:solidFill>
                 <a:latin typeface="Arial"/>
               </a:rPr>
-              <a:t>Indy · 11 %</a:t>
+              <a:t>Calendrier, réforme et obligations · 15 %</a:t>
             </a:r>
           </a:p>
         </p:txBody>
@@ -6007,7 +6007,7 @@
         <p:spPr>
           <a:xfrm>
             <a:off x="8296656" y="5193792"/>
-            <a:ext cx="2072640" cy="152400"/>
+            <a:ext cx="2225040" cy="152400"/>
           </a:xfrm>
           <a:prstGeom prst="rect">
             <a:avLst/>
@@ -6022,13 +6022,13 @@
           <a:p>
             <a:pPr algn="l"/>
             <a:r>
-              <a:rPr sz="1000" b="0" i="0">
+              <a:rPr sz="800" b="0" i="0">
                 <a:solidFill>
                   <a:srgbClr val="111111"/>
                 </a:solidFill>
                 <a:latin typeface="Arial"/>
               </a:rPr>
-              <a:t>Odoo · 10 %</a:t>
+              <a:t>Application selon le profil de l'entreprise · 12 %</a:t>
             </a:r>
           </a:p>
         </p:txBody>
@@ -6086,7 +6086,7 @@
         <p:spPr>
           <a:xfrm>
             <a:off x="8296656" y="5462016"/>
-            <a:ext cx="2072640" cy="152400"/>
+            <a:ext cx="2225040" cy="152400"/>
           </a:xfrm>
           <a:prstGeom prst="rect">
             <a:avLst/>
@@ -6101,13 +6101,13 @@
           <a:p>
             <a:pPr algn="l"/>
             <a:r>
-              <a:rPr sz="1000" b="0" i="0">
+              <a:rPr sz="800" b="0" i="0">
                 <a:solidFill>
                   <a:srgbClr val="111111"/>
                 </a:solidFill>
                 <a:latin typeface="Arial"/>
               </a:rPr>
-              <a:t>Tiime · 7 %</a:t>
+              <a:t>Intégration technique et interopérabilité · 9 %</a:t>
             </a:r>
           </a:p>
         </p:txBody>
@@ -6120,87 +6120,8 @@
         </p:nvSpPr>
         <p:spPr>
           <a:xfrm>
-            <a:off x="8077200" y="5748528"/>
-            <a:ext cx="121920" cy="121920"/>
-          </a:xfrm>
-          <a:prstGeom prst="rect">
-            <a:avLst/>
-          </a:prstGeom>
-          <a:solidFill>
-            <a:srgbClr val="A09278"/>
-          </a:solidFill>
-          <a:ln>
-            <a:noFill/>
-          </a:ln>
-          <a:effectLst/>
-        </p:spPr>
-        <p:style>
-          <a:lnRef idx="1">
-            <a:schemeClr val="accent1"/>
-          </a:lnRef>
-          <a:fillRef idx="3">
-            <a:schemeClr val="accent1"/>
-          </a:fillRef>
-          <a:effectRef idx="2">
-            <a:schemeClr val="accent1"/>
-          </a:effectRef>
-          <a:fontRef idx="minor">
-            <a:schemeClr val="lt1"/>
-          </a:fontRef>
-        </p:style>
-        <p:txBody>
-          <a:bodyPr rtlCol="0" anchor="ctr"/>
-          <a:lstStyle/>
-          <a:p>
-            <a:pPr algn="ctr"/>
-          </a:p>
-        </p:txBody>
-      </p:sp>
-      <p:sp>
-        <p:nvSpPr>
-          <p:cNvPr id="79" name="TextBox 78"/>
-          <p:cNvSpPr txBox="1"/>
-          <p:nvPr/>
-        </p:nvSpPr>
-        <p:spPr>
-          <a:xfrm>
-            <a:off x="8296656" y="5730240"/>
-            <a:ext cx="2072640" cy="152400"/>
-          </a:xfrm>
-          <a:prstGeom prst="rect">
-            <a:avLst/>
-          </a:prstGeom>
-          <a:noFill/>
-        </p:spPr>
-        <p:txBody>
-          <a:bodyPr wrap="square" anchor="t" lIns="0" rIns="0" tIns="0" bIns="0">
-            <a:spAutoFit/>
-          </a:bodyPr>
-          <a:lstStyle/>
-          <a:p>
-            <a:pPr algn="l"/>
-            <a:r>
-              <a:rPr sz="1000" b="0" i="0">
-                <a:solidFill>
-                  <a:srgbClr val="111111"/>
-                </a:solidFill>
-                <a:latin typeface="Arial"/>
-              </a:rPr>
-              <a:t>Autres (dont Iopole 0,2 %) · 24 %</a:t>
-            </a:r>
-          </a:p>
-        </p:txBody>
-      </p:sp>
-      <p:sp>
-        <p:nvSpPr>
-          <p:cNvPr id="80" name="Rectangle 79"/>
-          <p:cNvSpPr/>
-          <p:nvPr/>
-        </p:nvSpPr>
-        <p:spPr>
-          <a:xfrm>
             <a:off x="10564368" y="4450080"/>
-            <a:ext cx="475488" cy="482803"/>
+            <a:ext cx="475488" cy="469392"/>
           </a:xfrm>
           <a:prstGeom prst="rect">
             <a:avLst/>
@@ -6237,14 +6158,14 @@
       </p:sp>
       <p:sp>
         <p:nvSpPr>
-          <p:cNvPr id="81" name="TextBox 80"/>
+          <p:cNvPr id="79" name="TextBox 78"/>
           <p:cNvSpPr txBox="1"/>
           <p:nvPr/>
         </p:nvSpPr>
         <p:spPr>
           <a:xfrm>
             <a:off x="10564368" y="4450080"/>
-            <a:ext cx="475488" cy="482803"/>
+            <a:ext cx="475488" cy="469392"/>
           </a:xfrm>
           <a:prstGeom prst="rect">
             <a:avLst/>
@@ -6265,21 +6186,21 @@
                 </a:solidFill>
                 <a:latin typeface="Arial"/>
               </a:rPr>
-              <a:t>36 %</a:t>
-            </a:r>
-          </a:p>
-        </p:txBody>
-      </p:sp>
-      <p:sp>
-        <p:nvSpPr>
-          <p:cNvPr id="82" name="Rectangle 81"/>
+              <a:t>35 %</a:t>
+            </a:r>
+          </a:p>
+        </p:txBody>
+      </p:sp>
+      <p:sp>
+        <p:nvSpPr>
+          <p:cNvPr id="80" name="Rectangle 79"/>
           <p:cNvSpPr/>
           <p:nvPr/>
         </p:nvSpPr>
         <p:spPr>
           <a:xfrm>
-            <a:off x="10564368" y="4932883"/>
-            <a:ext cx="475488" cy="160934"/>
+            <a:off x="10564368" y="4919472"/>
+            <a:ext cx="475488" cy="388924"/>
           </a:xfrm>
           <a:prstGeom prst="rect">
             <a:avLst/>
@@ -6316,14 +6237,49 @@
       </p:sp>
       <p:sp>
         <p:nvSpPr>
-          <p:cNvPr id="83" name="Rectangle 82"/>
+          <p:cNvPr id="81" name="TextBox 80"/>
+          <p:cNvSpPr txBox="1"/>
+          <p:nvPr/>
+        </p:nvSpPr>
+        <p:spPr>
+          <a:xfrm>
+            <a:off x="10564368" y="4919472"/>
+            <a:ext cx="475488" cy="388924"/>
+          </a:xfrm>
+          <a:prstGeom prst="rect">
+            <a:avLst/>
+          </a:prstGeom>
+          <a:noFill/>
+        </p:spPr>
+        <p:txBody>
+          <a:bodyPr wrap="square" anchor="ctr" lIns="0" rIns="0" tIns="0" bIns="0">
+            <a:spAutoFit/>
+          </a:bodyPr>
+          <a:lstStyle/>
+          <a:p>
+            <a:pPr algn="ctr"/>
+            <a:r>
+              <a:rPr sz="1000" b="1" i="0">
+                <a:solidFill>
+                  <a:srgbClr val="FFFFFF"/>
+                </a:solidFill>
+                <a:latin typeface="Arial"/>
+              </a:rPr>
+              <a:t>29 %</a:t>
+            </a:r>
+          </a:p>
+        </p:txBody>
+      </p:sp>
+      <p:sp>
+        <p:nvSpPr>
+          <p:cNvPr id="82" name="Rectangle 81"/>
           <p:cNvSpPr/>
           <p:nvPr/>
         </p:nvSpPr>
         <p:spPr>
           <a:xfrm>
-            <a:off x="10564368" y="5093817"/>
-            <a:ext cx="475488" cy="147523"/>
+            <a:off x="10564368" y="5308396"/>
+            <a:ext cx="475488" cy="201168"/>
           </a:xfrm>
           <a:prstGeom prst="rect">
             <a:avLst/>
@@ -6360,14 +6316,14 @@
       </p:sp>
       <p:sp>
         <p:nvSpPr>
-          <p:cNvPr id="84" name="Rectangle 83"/>
+          <p:cNvPr id="83" name="Rectangle 82"/>
           <p:cNvSpPr/>
           <p:nvPr/>
         </p:nvSpPr>
         <p:spPr>
           <a:xfrm>
-            <a:off x="10564368" y="5241340"/>
-            <a:ext cx="475488" cy="134112"/>
+            <a:off x="10564368" y="5509564"/>
+            <a:ext cx="475488" cy="160934"/>
           </a:xfrm>
           <a:prstGeom prst="rect">
             <a:avLst/>
@@ -6404,64 +6360,20 @@
       </p:sp>
       <p:sp>
         <p:nvSpPr>
-          <p:cNvPr id="85" name="Rectangle 84"/>
+          <p:cNvPr id="84" name="Rectangle 83"/>
           <p:cNvSpPr/>
           <p:nvPr/>
         </p:nvSpPr>
         <p:spPr>
           <a:xfrm>
-            <a:off x="10564368" y="5375452"/>
-            <a:ext cx="475488" cy="93878"/>
+            <a:off x="10564368" y="5670499"/>
+            <a:ext cx="475488" cy="120700"/>
           </a:xfrm>
           <a:prstGeom prst="rect">
             <a:avLst/>
           </a:prstGeom>
           <a:solidFill>
             <a:srgbClr val="3E5A78"/>
-          </a:solidFill>
-          <a:ln>
-            <a:noFill/>
-          </a:ln>
-          <a:effectLst/>
-        </p:spPr>
-        <p:style>
-          <a:lnRef idx="1">
-            <a:schemeClr val="accent1"/>
-          </a:lnRef>
-          <a:fillRef idx="3">
-            <a:schemeClr val="accent1"/>
-          </a:fillRef>
-          <a:effectRef idx="2">
-            <a:schemeClr val="accent1"/>
-          </a:effectRef>
-          <a:fontRef idx="minor">
-            <a:schemeClr val="lt1"/>
-          </a:fontRef>
-        </p:style>
-        <p:txBody>
-          <a:bodyPr rtlCol="0" anchor="ctr"/>
-          <a:lstStyle/>
-          <a:p>
-            <a:pPr algn="ctr"/>
-          </a:p>
-        </p:txBody>
-      </p:sp>
-      <p:sp>
-        <p:nvSpPr>
-          <p:cNvPr id="86" name="Rectangle 85"/>
-          <p:cNvSpPr/>
-          <p:nvPr/>
-        </p:nvSpPr>
-        <p:spPr>
-          <a:xfrm>
-            <a:off x="10564368" y="5469331"/>
-            <a:ext cx="475488" cy="321868"/>
-          </a:xfrm>
-          <a:prstGeom prst="rect">
-            <a:avLst/>
-          </a:prstGeom>
-          <a:solidFill>
-            <a:srgbClr val="A09278"/>
           </a:solidFill>
           <a:ln>
             <a:noFill/>
